--- a/lectures/03/Strings.pptx
+++ b/lectures/03/Strings.pptx
@@ -237,7 +237,7 @@
           <a:p>
             <a:fld id="{426890D5-55D3-4584-BC51-03E5E36A84C4}" type="datetimeFigureOut">
               <a:rPr lang="en-US" smtClean="0"/>
-              <a:t>2/17/2026</a:t>
+              <a:t>2/24/2026</a:t>
             </a:fld>
             <a:endParaRPr lang="en-US"/>
           </a:p>
@@ -9724,7 +9724,7 @@
           <a:p>
             <a:fld id="{37358126-11F0-42F1-B2AD-BCB361797751}" type="datetime1">
               <a:rPr lang="en-US" smtClean="0"/>
-              <a:t>2/17/2026</a:t>
+              <a:t>2/24/2026</a:t>
             </a:fld>
             <a:endParaRPr lang="en-US"/>
           </a:p>
@@ -9922,7 +9922,7 @@
           <a:p>
             <a:fld id="{6512E9E6-9212-4001-A285-634ECC620462}" type="datetime1">
               <a:rPr lang="en-US" smtClean="0"/>
-              <a:t>2/17/2026</a:t>
+              <a:t>2/24/2026</a:t>
             </a:fld>
             <a:endParaRPr lang="en-US"/>
           </a:p>
@@ -10130,7 +10130,7 @@
           <a:p>
             <a:fld id="{9C6A14F9-3CEA-491F-9D5C-49079BB88ACA}" type="datetime1">
               <a:rPr lang="en-US" smtClean="0"/>
-              <a:t>2/17/2026</a:t>
+              <a:t>2/24/2026</a:t>
             </a:fld>
             <a:endParaRPr lang="en-US"/>
           </a:p>
@@ -10328,7 +10328,7 @@
           <a:p>
             <a:fld id="{FD1562E5-A477-4720-A5B6-861E705CA596}" type="datetime1">
               <a:rPr lang="en-US" smtClean="0"/>
-              <a:t>2/17/2026</a:t>
+              <a:t>2/24/2026</a:t>
             </a:fld>
             <a:endParaRPr lang="en-US"/>
           </a:p>
@@ -10603,7 +10603,7 @@
           <a:p>
             <a:fld id="{0546B681-9E76-4503-92B2-6085A3FBB20C}" type="datetime1">
               <a:rPr lang="en-US" smtClean="0"/>
-              <a:t>2/17/2026</a:t>
+              <a:t>2/24/2026</a:t>
             </a:fld>
             <a:endParaRPr lang="en-US"/>
           </a:p>
@@ -10868,7 +10868,7 @@
           <a:p>
             <a:fld id="{373EE56F-41EF-4004-8A84-CA0988261543}" type="datetime1">
               <a:rPr lang="en-US" smtClean="0"/>
-              <a:t>2/17/2026</a:t>
+              <a:t>2/24/2026</a:t>
             </a:fld>
             <a:endParaRPr lang="en-US"/>
           </a:p>
@@ -11280,7 +11280,7 @@
           <a:p>
             <a:fld id="{582138C8-72C1-4656-A61F-6B1A26C52FFD}" type="datetime1">
               <a:rPr lang="en-US" smtClean="0"/>
-              <a:t>2/17/2026</a:t>
+              <a:t>2/24/2026</a:t>
             </a:fld>
             <a:endParaRPr lang="en-US"/>
           </a:p>
@@ -11421,7 +11421,7 @@
           <a:p>
             <a:fld id="{1540441C-BE82-4239-8A52-C467F35B73F0}" type="datetime1">
               <a:rPr lang="en-US" smtClean="0"/>
-              <a:t>2/17/2026</a:t>
+              <a:t>2/24/2026</a:t>
             </a:fld>
             <a:endParaRPr lang="en-US"/>
           </a:p>
@@ -11534,7 +11534,7 @@
           <a:p>
             <a:fld id="{74B4077B-694A-4126-B19F-30B1D6B48D50}" type="datetime1">
               <a:rPr lang="en-US" smtClean="0"/>
-              <a:t>2/17/2026</a:t>
+              <a:t>2/24/2026</a:t>
             </a:fld>
             <a:endParaRPr lang="en-US"/>
           </a:p>
@@ -11845,7 +11845,7 @@
           <a:p>
             <a:fld id="{8EA8933B-7571-4724-81C2-BE48EF44F308}" type="datetime1">
               <a:rPr lang="en-US" smtClean="0"/>
-              <a:t>2/17/2026</a:t>
+              <a:t>2/24/2026</a:t>
             </a:fld>
             <a:endParaRPr lang="en-US"/>
           </a:p>
@@ -12133,7 +12133,7 @@
           <a:p>
             <a:fld id="{7C46E61E-3E6C-41B0-A0F1-BD3B6E590911}" type="datetime1">
               <a:rPr lang="en-US" smtClean="0"/>
-              <a:t>2/17/2026</a:t>
+              <a:t>2/24/2026</a:t>
             </a:fld>
             <a:endParaRPr lang="en-US"/>
           </a:p>
@@ -12374,7 +12374,7 @@
           <a:p>
             <a:fld id="{DCFF7731-4D22-42BA-97A8-9A0FFDBD9EC8}" type="datetime1">
               <a:rPr lang="en-US" smtClean="0"/>
-              <a:t>2/17/2026</a:t>
+              <a:t>2/24/2026</a:t>
             </a:fld>
             <a:endParaRPr lang="en-US"/>
           </a:p>
@@ -28192,13 +28192,13 @@
   <p:clrMapOvr>
     <a:masterClrMapping/>
   </p:clrMapOvr>
-  <mc:AlternateContent xmlns:mc="http://schemas.openxmlformats.org/markup-compatibility/2006">
-    <mc:Choice xmlns:p159="http://schemas.microsoft.com/office/powerpoint/2015/09/main" Requires="p159">
+  <mc:AlternateContent xmlns:mc="http://schemas.openxmlformats.org/markup-compatibility/2006" xmlns:p159="http://schemas.microsoft.com/office/powerpoint/2015/09/main">
+    <mc:Choice Requires="p159">
       <p:transition xmlns:p14="http://schemas.microsoft.com/office/powerpoint/2010/main" spd="slow" p14:dur="2000">
         <p159:morph option="byWord"/>
       </p:transition>
     </mc:Choice>
-    <mc:Fallback>
+    <mc:Fallback xmlns="">
       <p:transition spd="slow">
         <p:fade/>
       </p:transition>
